--- a/powerpoints/Seance_05_Scene2_The_timeline.pptx
+++ b/powerpoints/Seance_05_Scene2_The_timeline.pptx
@@ -133,31 +133,31 @@
   <p:extLst>
     <p:ext uri="{521415D9-36F7-43E2-AB2F-B90AF26B5E84}">
       <p14:sectionLst xmlns:p14="http://schemas.microsoft.com/office/powerpoint/2010/main">
-        <p14:section name="Ouverture" id="{1be6ec7a-3353-2dda-ba9a-d573b7d062c4}">
+        <p14:section name="Ouverture" id="{63d50c38-eca9-6ceb-12f0-1617fa0ecfab}">
           <p14:sldIdLst>
             <p14:sldId id="256"/>
           </p14:sldIdLst>
         </p14:section>
-        <p14:section name="Warm-up" id="{a5c82be5-b527-5c16-4399-61542b467b8d}">
+        <p14:section name="Warm-up" id="{38853e85-1362-b60f-9d4a-cbe56883ed6a}">
           <p14:sldIdLst>
             <p14:sldId id="257"/>
             <p14:sldId id="258"/>
           </p14:sldIdLst>
         </p14:section>
-        <p14:section name="The whiteboard" id="{0523a398-4faa-188c-8053-0bb9b99b35cd}">
+        <p14:section name="The whiteboard" id="{881128bf-a01d-a1c3-15c8-844114502215}">
           <p14:sldIdLst>
             <p14:sldId id="259"/>
             <p14:sldId id="260"/>
             <p14:sldId id="261"/>
           </p14:sldIdLst>
         </p14:section>
-        <p14:section name="When or while?" id="{c95fe601-5811-60a2-f101-30cccba657b6}">
+        <p14:section name="When or while?" id="{1774bacf-9d30-9075-c913-0d0be1465b65}">
           <p14:sldIdLst>
             <p14:sldId id="262"/>
             <p14:sldId id="263"/>
           </p14:sldIdLst>
         </p14:section>
-        <p14:section name="The timeline" id="{2c0397a3-5860-374e-912d-8ceaeda29694}">
+        <p14:section name="The timeline" id="{c3eef27f-01a5-dd9b-0d0e-fa6f04fe21e6}">
           <p14:sldIdLst>
             <p14:sldId id="264"/>
             <p14:sldId id="265"/>
@@ -166,7 +166,7 @@
             <p14:sldId id="268"/>
           </p14:sldIdLst>
         </p14:section>
-        <p14:section name="Dry run" id="{721ed2da-04c6-77b6-0f48-93bf22b84716}">
+        <p14:section name="Dry run" id="{840f158d-437e-971e-7771-f6016e9e95b9}">
           <p14:sldIdLst>
             <p14:sldId id="269"/>
             <p14:sldId id="270"/>
@@ -178,7 +178,7 @@
             <p14:sldId id="276"/>
           </p14:sldIdLst>
         </p14:section>
-        <p14:section name="Speaking" id="{54ffa1a6-c3a6-b867-dbfd-bd819a9cd588}">
+        <p14:section name="Speaking" id="{4797bcc8-4f0a-38d7-2422-9b33aa8827a3}">
           <p14:sldIdLst>
             <p14:sldId id="277"/>
             <p14:sldId id="278"/>
@@ -187,7 +187,7 @@
             <p14:sldId id="281"/>
           </p14:sldIdLst>
         </p14:section>
-        <p14:section name="Clôture" id="{3c1f093b-354d-ac13-4bb4-d00c27bd4d12}">
+        <p14:section name="Clôture" id="{989fd749-2e60-918e-9aed-f9481a8d9109}">
           <p14:sldIdLst>
             <p14:sldId id="282"/>
           </p14:sldIdLst>
@@ -24120,7 +24120,7 @@
         <p:spPr>
           <a:xfrm>
             <a:off x="6995160" y="2880360"/>
-            <a:ext cx="4645152" cy="2106168"/>
+            <a:ext cx="4645152" cy="1847088"/>
           </a:xfrm>
           <a:prstGeom prst="rect">
             <a:avLst/>
@@ -24139,7 +24139,7 @@
               <a:buNone/>
             </a:pPr>
             <a:r>
-              <a:rPr lang="en-US" sz="1800" dirty="0">
+              <a:rPr lang="en-US" sz="1700" dirty="0">
                 <a:solidFill>
                   <a:schemeClr val="tx1"/>
                 </a:solidFill>
@@ -24147,7 +24147,7 @@
               <a:t>It is </a:t>
             </a:r>
             <a:r>
-              <a:rPr lang="en-US" sz="1800" b="1" dirty="0">
+              <a:rPr lang="en-US" sz="1700" b="1" dirty="0">
                 <a:solidFill>
                   <a:schemeClr val="tx1"/>
                 </a:solidFill>
@@ -24155,14 +24155,14 @@
               <a:t>8.20</a:t>
             </a:r>
             <a:r>
-              <a:rPr lang="en-US" sz="1800" dirty="0">
+              <a:rPr lang="en-US" sz="1700" dirty="0">
                 <a:solidFill>
                   <a:schemeClr val="tx1"/>
                 </a:solidFill>
               </a:rPr>
               <a:t>. Mark hands you a marker.</a:t>
             </a:r>
-            <a:endParaRPr lang="en-US" sz="1800" dirty="0"/>
+            <a:endParaRPr lang="en-US" sz="1700" dirty="0"/>
           </a:p>
           <a:p>
             <a:pPr indent="0" marL="0">
@@ -24172,7 +24172,7 @@
               <a:buNone/>
             </a:pPr>
             <a:r>
-              <a:rPr lang="en-US" sz="1800" b="1" dirty="0">
+              <a:rPr lang="en-US" sz="1700" b="1" dirty="0">
                 <a:solidFill>
                   <a:schemeClr val="tx1"/>
                 </a:solidFill>
@@ -24180,7 +24180,7 @@
               <a:t>Samuel</a:t>
             </a:r>
             <a:r>
-              <a:rPr lang="en-US" sz="1800" dirty="0">
+              <a:rPr lang="en-US" sz="1700" dirty="0">
                 <a:solidFill>
                   <a:schemeClr val="tx1"/>
                 </a:solidFill>
@@ -24188,7 +24188,7 @@
               <a:t> is holding the alarm log. </a:t>
             </a:r>
             <a:r>
-              <a:rPr lang="en-US" sz="1800" b="1" dirty="0">
+              <a:rPr lang="en-US" sz="1700" b="1" dirty="0">
                 <a:solidFill>
                   <a:schemeClr val="tx1"/>
                 </a:solidFill>
@@ -24196,14 +24196,14 @@
               <a:t>Iris</a:t>
             </a:r>
             <a:r>
-              <a:rPr lang="en-US" sz="1800" dirty="0">
+              <a:rPr lang="en-US" sz="1700" dirty="0">
                 <a:solidFill>
                   <a:schemeClr val="tx1"/>
                 </a:solidFill>
               </a:rPr>
               <a:t> has the contractor’s sign-out sheet on her phone. You have your notes from the voicemail.</a:t>
             </a:r>
-            <a:endParaRPr lang="en-US" sz="1800" dirty="0"/>
+            <a:endParaRPr lang="en-US" sz="1700" dirty="0"/>
           </a:p>
           <a:p>
             <a:pPr indent="0" marL="0">
@@ -24213,7 +24213,7 @@
               <a:buNone/>
             </a:pPr>
             <a:r>
-              <a:rPr lang="en-US" sz="1800" dirty="0">
+              <a:rPr lang="en-US" sz="1700" dirty="0">
                 <a:solidFill>
                   <a:schemeClr val="tx1"/>
                 </a:solidFill>
@@ -24221,14 +24221,14 @@
               <a:t>Forty minutes. An empty whiteboard. </a:t>
             </a:r>
             <a:r>
-              <a:rPr lang="en-US" sz="1800" b="1" dirty="0">
+              <a:rPr lang="en-US" sz="1700" b="1" dirty="0">
                 <a:solidFill>
                   <a:schemeClr val="tx1"/>
                 </a:solidFill>
               </a:rPr>
               <a:t>Facts only.</a:t>
             </a:r>
-            <a:endParaRPr lang="en-US" sz="1800" dirty="0"/>
+            <a:endParaRPr lang="en-US" sz="1700" dirty="0"/>
           </a:p>
         </p:txBody>
       </p:sp>
@@ -24240,12 +24240,12 @@
         </p:nvSpPr>
         <p:spPr>
           <a:xfrm>
-            <a:off x="6995160" y="5169408"/>
-            <a:ext cx="4645152" cy="1139952"/>
+            <a:off x="6995160" y="4910328"/>
+            <a:ext cx="4645152" cy="1399032"/>
           </a:xfrm>
           <a:prstGeom prst="roundRect">
             <a:avLst>
-              <a:gd name="adj" fmla="val 6417"/>
+              <a:gd name="adj" fmla="val 5229"/>
             </a:avLst>
           </a:prstGeom>
           <a:solidFill>
@@ -24269,7 +24269,7 @@
         </p:nvSpPr>
         <p:spPr>
           <a:xfrm>
-            <a:off x="7196328" y="5279136"/>
+            <a:off x="7196328" y="5020056"/>
             <a:ext cx="4279392" cy="274320"/>
           </a:xfrm>
           <a:prstGeom prst="rect">
@@ -24305,8 +24305,8 @@
         </p:nvSpPr>
         <p:spPr>
           <a:xfrm>
-            <a:off x="7196328" y="5571744"/>
-            <a:ext cx="4242816" cy="682752"/>
+            <a:off x="7196328" y="5312664"/>
+            <a:ext cx="4242816" cy="941832"/>
           </a:xfrm>
           <a:prstGeom prst="rect">
             <a:avLst/>
@@ -24744,7 +24744,7 @@
               <a:buNone/>
             </a:pPr>
             <a:r>
-              <a:rPr lang="en-US" sz="1100" dirty="0">
+              <a:rPr lang="en-US" sz="1000" dirty="0">
                 <a:solidFill>
                   <a:schemeClr val="tx1"/>
                 </a:solidFill>
@@ -24752,14 +24752,14 @@
               <a:t>the </a:t>
             </a:r>
             <a:r>
-              <a:rPr lang="en-US" sz="1100" b="1" dirty="0">
+              <a:rPr lang="en-US" sz="1000" b="1" dirty="0">
                 <a:solidFill>
                   <a:schemeClr val="tx1"/>
                 </a:solidFill>
               </a:rPr>
               <a:t>sign-out sheet</a:t>
             </a:r>
-            <a:endParaRPr lang="en-US" sz="1100" dirty="0"/>
+            <a:endParaRPr lang="en-US" sz="1000" dirty="0"/>
           </a:p>
         </p:txBody>
       </p:sp>

--- a/powerpoints/Seance_05_Scene2_The_timeline.pptx
+++ b/powerpoints/Seance_05_Scene2_The_timeline.pptx
@@ -133,31 +133,31 @@
   <p:extLst>
     <p:ext uri="{521415D9-36F7-43E2-AB2F-B90AF26B5E84}">
       <p14:sectionLst xmlns:p14="http://schemas.microsoft.com/office/powerpoint/2010/main">
-        <p14:section name="Ouverture" id="{63d50c38-eca9-6ceb-12f0-1617fa0ecfab}">
+        <p14:section name="Ouverture" id="{6e469337-320b-6e1b-c07f-373430e0b0a8}">
           <p14:sldIdLst>
             <p14:sldId id="256"/>
           </p14:sldIdLst>
         </p14:section>
-        <p14:section name="Warm-up" id="{38853e85-1362-b60f-9d4a-cbe56883ed6a}">
+        <p14:section name="Warm-up" id="{fe41587a-ffcf-5687-9dc3-0d4601f2d29b}">
           <p14:sldIdLst>
             <p14:sldId id="257"/>
             <p14:sldId id="258"/>
           </p14:sldIdLst>
         </p14:section>
-        <p14:section name="The whiteboard" id="{881128bf-a01d-a1c3-15c8-844114502215}">
+        <p14:section name="The whiteboard" id="{159f238b-c465-4573-5755-f5423a0703a5}">
           <p14:sldIdLst>
             <p14:sldId id="259"/>
             <p14:sldId id="260"/>
             <p14:sldId id="261"/>
           </p14:sldIdLst>
         </p14:section>
-        <p14:section name="When or while?" id="{1774bacf-9d30-9075-c913-0d0be1465b65}">
+        <p14:section name="When or while?" id="{b2236d7f-18ec-f33e-72d2-8ed4a1b298c6}">
           <p14:sldIdLst>
             <p14:sldId id="262"/>
             <p14:sldId id="263"/>
           </p14:sldIdLst>
         </p14:section>
-        <p14:section name="The timeline" id="{c3eef27f-01a5-dd9b-0d0e-fa6f04fe21e6}">
+        <p14:section name="The timeline" id="{b93c6f08-0edb-4dad-2a60-740ccb3106f1}">
           <p14:sldIdLst>
             <p14:sldId id="264"/>
             <p14:sldId id="265"/>
@@ -166,7 +166,7 @@
             <p14:sldId id="268"/>
           </p14:sldIdLst>
         </p14:section>
-        <p14:section name="Dry run" id="{840f158d-437e-971e-7771-f6016e9e95b9}">
+        <p14:section name="Dry run" id="{84ccbf6d-de9d-b807-cdd7-cae1108488c1}">
           <p14:sldIdLst>
             <p14:sldId id="269"/>
             <p14:sldId id="270"/>
@@ -178,7 +178,7 @@
             <p14:sldId id="276"/>
           </p14:sldIdLst>
         </p14:section>
-        <p14:section name="Speaking" id="{4797bcc8-4f0a-38d7-2422-9b33aa8827a3}">
+        <p14:section name="Speaking" id="{999f258f-02c7-2773-a34a-3313761c081b}">
           <p14:sldIdLst>
             <p14:sldId id="277"/>
             <p14:sldId id="278"/>
@@ -187,7 +187,7 @@
             <p14:sldId id="281"/>
           </p14:sldIdLst>
         </p14:section>
-        <p14:section name="Clôture" id="{989fd749-2e60-918e-9aed-f9481a8d9109}">
+        <p14:section name="Clôture" id="{a49c7103-9696-3d29-a5db-c42510bd01d9}">
           <p14:sldIdLst>
             <p14:sldId id="282"/>
           </p14:sldIdLst>
